--- a/~sasano/lecture/pn2/26/P02.pptx
+++ b/~sasano/lecture/pn2/26/P02.pptx
@@ -244,7 +244,7 @@
             <a:fld id="{1750565A-D855-4A15-8AFC-ED7B6471BF07}" type="datetimeFigureOut">
               <a:rPr kumimoji="1" lang="ja-JP" altLang="en-US" smtClean="0"/>
               <a:pPr/>
-              <a:t>2025/10/7</a:t>
+              <a:t>2026/9/28</a:t>
             </a:fld>
             <a:endParaRPr kumimoji="1" lang="ja-JP" altLang="en-US"/>
           </a:p>
@@ -3971,7 +3971,7 @@
         </p:nvSpPr>
         <p:spPr bwMode="auto">
           <a:xfrm>
-            <a:off x="2411760" y="5084763"/>
+            <a:off x="2420954" y="5111749"/>
             <a:ext cx="3960812" cy="523875"/>
           </a:xfrm>
           <a:prstGeom prst="rect">
@@ -3993,10 +3993,16 @@
           <a:p>
             <a:pPr algn="ctr"/>
             <a:r>
+              <a:rPr lang="ja-JP" altLang="en-US" sz="2800">
+                <a:ea typeface="ＭＳ Ｐゴシック" charset="-128"/>
+              </a:rPr>
+              <a:t>篠埜  </a:t>
+            </a:r>
+            <a:r>
               <a:rPr lang="ja-JP" altLang="en-US" sz="2800" dirty="0">
                 <a:ea typeface="ＭＳ Ｐゴシック" charset="-128"/>
               </a:rPr>
-              <a:t>情報工学科   篠埜  功</a:t>
+              <a:t>功</a:t>
             </a:r>
           </a:p>
         </p:txBody>
